--- a/assets/figures-editable/c3-c4/c3-e14.pptx
+++ b/assets/figures-editable/c3-c4/c3-e14.pptx
@@ -3104,8 +3104,8 @@
         </p:nvSpPr>
         <p:spPr>
           <a:xfrm>
-            <a:off x="274320" y="137160"/>
-            <a:ext cx="11612880" cy="365760"/>
+            <a:off x="274320" y="118872"/>
+            <a:ext cx="11612880" cy="340105"/>
           </a:xfrm>
           <a:prstGeom prst="rect">
             <a:avLst/>
@@ -3114,7 +3114,7 @@
           <a:effectLst/>
         </p:spPr>
         <p:txBody>
-          <a:bodyPr wrap="square" lIns="27432" rIns="27432" tIns="18288" bIns="18288" anchor="ctr">
+          <a:bodyPr wrap="none" lIns="18288" rIns="18288" tIns="18288" bIns="18288" anchor="t">
             <a:spAutoFit/>
           </a:bodyPr>
           <a:lstStyle/>
@@ -3125,7 +3125,7 @@
               </a:spcAft>
             </a:pPr>
             <a:r>
-              <a:rPr sz="2100" b="0" i="0">
+              <a:rPr sz="1900" b="1" i="0">
                 <a:solidFill>
                   <a:srgbClr val="8EDBD4"/>
                 </a:solidFill>
@@ -3138,20 +3138,54 @@
       </p:sp>
       <p:sp>
         <p:nvSpPr>
-          <p:cNvPr id="3" name="C3-E14 rect 1" descr="sci-ppt:o001"/>
+          <p:cNvPr id="3" name="C3-E14 round_rect 1" descr="sci-ppt:o001"/>
           <p:cNvSpPr/>
           <p:nvPr/>
         </p:nvSpPr>
         <p:spPr>
           <a:xfrm>
-            <a:off x="822960" y="1051560"/>
-            <a:ext cx="9875520" cy="2377440"/>
+            <a:off x="365760" y="914400"/>
+            <a:ext cx="7223760" cy="4846320"/>
+          </a:xfrm>
+          <a:prstGeom prst="roundRect">
+            <a:avLst/>
+          </a:prstGeom>
+          <a:solidFill>
+            <a:srgbClr val="1E4A5A"/>
+          </a:solidFill>
+          <a:ln w="17780">
+            <a:solidFill>
+              <a:srgbClr val="2B6678"/>
+            </a:solidFill>
+          </a:ln>
+          <a:effectLst/>
+        </p:spPr>
+        <p:txBody>
+          <a:bodyPr rtlCol="0" anchor="ctr"/>
+          <a:lstStyle/>
+          <a:p>
+            <a:pPr algn="ctr"/>
+          </a:p>
+        </p:txBody>
+      </p:sp>
+      <p:sp>
+        <p:nvSpPr>
+          <p:cNvPr id="4" name="C3-E14 rect 2" descr="sci-ppt:o002"/>
+          <p:cNvSpPr/>
+          <p:nvPr/>
+        </p:nvSpPr>
+        <p:spPr>
+          <a:xfrm>
+            <a:off x="822960" y="5074920"/>
+            <a:ext cx="6400800" cy="237744"/>
           </a:xfrm>
           <a:prstGeom prst="rect">
             <a:avLst/>
           </a:prstGeom>
-          <a:noFill/>
-          <a:ln w="19050">
+          <a:solidFill>
+            <a:srgbClr val="3A5362"/>
+          </a:solidFill>
+          <a:ln w="16510">
             <a:solidFill>
               <a:srgbClr val="B4C7D2"/>
             </a:solidFill>
@@ -3166,30 +3200,800 @@
           </a:p>
         </p:txBody>
       </p:sp>
-      <p:sp>
-        <p:nvSpPr>
-          <p:cNvPr id="4" name="C3-E14 ellipse 2" descr="sci-ppt:o002"/>
-          <p:cNvSpPr/>
-          <p:nvPr/>
-        </p:nvSpPr>
-        <p:spPr>
-          <a:xfrm>
-            <a:off x="2194560" y="1600200"/>
-            <a:ext cx="1280160" cy="1280160"/>
-          </a:xfrm>
-          <a:prstGeom prst="ellipse">
-            <a:avLst/>
-          </a:prstGeom>
-          <a:solidFill>
-            <a:srgbClr val="213E4B"/>
-          </a:solidFill>
-          <a:ln w="19050">
+      <p:cxnSp>
+        <p:nvCxnSpPr>
+          <p:cNvPr id="5" name="C3-E14 line 3" descr="sci-ppt:o003"/>
+          <p:cNvCxnSpPr/>
+          <p:nvPr/>
+        </p:nvCxnSpPr>
+        <p:spPr>
+          <a:xfrm>
+            <a:off x="841248" y="5312664"/>
+            <a:ext cx="137160" cy="155448"/>
+          </a:xfrm>
+          <a:prstGeom prst="line">
+            <a:avLst/>
+          </a:prstGeom>
+          <a:ln w="12700">
             <a:solidFill>
               <a:srgbClr val="B4C7D2"/>
             </a:solidFill>
           </a:ln>
           <a:effectLst/>
         </p:spPr>
+      </p:cxnSp>
+      <p:cxnSp>
+        <p:nvCxnSpPr>
+          <p:cNvPr id="6" name="C3-E14 line 4" descr="sci-ppt:o004"/>
+          <p:cNvCxnSpPr/>
+          <p:nvPr/>
+        </p:nvCxnSpPr>
+        <p:spPr>
+          <a:xfrm>
+            <a:off x="1024128" y="5312664"/>
+            <a:ext cx="137160" cy="155448"/>
+          </a:xfrm>
+          <a:prstGeom prst="line">
+            <a:avLst/>
+          </a:prstGeom>
+          <a:ln w="12700">
+            <a:solidFill>
+              <a:srgbClr val="B4C7D2"/>
+            </a:solidFill>
+          </a:ln>
+          <a:effectLst/>
+        </p:spPr>
+      </p:cxnSp>
+      <p:cxnSp>
+        <p:nvCxnSpPr>
+          <p:cNvPr id="7" name="C3-E14 line 5" descr="sci-ppt:o005"/>
+          <p:cNvCxnSpPr/>
+          <p:nvPr/>
+        </p:nvCxnSpPr>
+        <p:spPr>
+          <a:xfrm>
+            <a:off x="1207008" y="5312664"/>
+            <a:ext cx="137160" cy="155448"/>
+          </a:xfrm>
+          <a:prstGeom prst="line">
+            <a:avLst/>
+          </a:prstGeom>
+          <a:ln w="12700">
+            <a:solidFill>
+              <a:srgbClr val="B4C7D2"/>
+            </a:solidFill>
+          </a:ln>
+          <a:effectLst/>
+        </p:spPr>
+      </p:cxnSp>
+      <p:cxnSp>
+        <p:nvCxnSpPr>
+          <p:cNvPr id="8" name="C3-E14 line 6" descr="sci-ppt:o006"/>
+          <p:cNvCxnSpPr/>
+          <p:nvPr/>
+        </p:nvCxnSpPr>
+        <p:spPr>
+          <a:xfrm>
+            <a:off x="1389888" y="5312664"/>
+            <a:ext cx="137160" cy="155448"/>
+          </a:xfrm>
+          <a:prstGeom prst="line">
+            <a:avLst/>
+          </a:prstGeom>
+          <a:ln w="12700">
+            <a:solidFill>
+              <a:srgbClr val="B4C7D2"/>
+            </a:solidFill>
+          </a:ln>
+          <a:effectLst/>
+        </p:spPr>
+      </p:cxnSp>
+      <p:cxnSp>
+        <p:nvCxnSpPr>
+          <p:cNvPr id="9" name="C3-E14 line 7" descr="sci-ppt:o007"/>
+          <p:cNvCxnSpPr/>
+          <p:nvPr/>
+        </p:nvCxnSpPr>
+        <p:spPr>
+          <a:xfrm>
+            <a:off x="1572768" y="5312664"/>
+            <a:ext cx="137160" cy="155448"/>
+          </a:xfrm>
+          <a:prstGeom prst="line">
+            <a:avLst/>
+          </a:prstGeom>
+          <a:ln w="12700">
+            <a:solidFill>
+              <a:srgbClr val="B4C7D2"/>
+            </a:solidFill>
+          </a:ln>
+          <a:effectLst/>
+        </p:spPr>
+      </p:cxnSp>
+      <p:cxnSp>
+        <p:nvCxnSpPr>
+          <p:cNvPr id="10" name="C3-E14 line 8" descr="sci-ppt:o008"/>
+          <p:cNvCxnSpPr/>
+          <p:nvPr/>
+        </p:nvCxnSpPr>
+        <p:spPr>
+          <a:xfrm>
+            <a:off x="1755648" y="5312664"/>
+            <a:ext cx="137159" cy="155448"/>
+          </a:xfrm>
+          <a:prstGeom prst="line">
+            <a:avLst/>
+          </a:prstGeom>
+          <a:ln w="12700">
+            <a:solidFill>
+              <a:srgbClr val="B4C7D2"/>
+            </a:solidFill>
+          </a:ln>
+          <a:effectLst/>
+        </p:spPr>
+      </p:cxnSp>
+      <p:cxnSp>
+        <p:nvCxnSpPr>
+          <p:cNvPr id="11" name="C3-E14 line 9" descr="sci-ppt:o009"/>
+          <p:cNvCxnSpPr/>
+          <p:nvPr/>
+        </p:nvCxnSpPr>
+        <p:spPr>
+          <a:xfrm>
+            <a:off x="1938528" y="5312664"/>
+            <a:ext cx="137160" cy="155448"/>
+          </a:xfrm>
+          <a:prstGeom prst="line">
+            <a:avLst/>
+          </a:prstGeom>
+          <a:ln w="12700">
+            <a:solidFill>
+              <a:srgbClr val="B4C7D2"/>
+            </a:solidFill>
+          </a:ln>
+          <a:effectLst/>
+        </p:spPr>
+      </p:cxnSp>
+      <p:cxnSp>
+        <p:nvCxnSpPr>
+          <p:cNvPr id="12" name="C3-E14 line 10" descr="sci-ppt:o010"/>
+          <p:cNvCxnSpPr/>
+          <p:nvPr/>
+        </p:nvCxnSpPr>
+        <p:spPr>
+          <a:xfrm>
+            <a:off x="2121408" y="5312664"/>
+            <a:ext cx="137160" cy="155448"/>
+          </a:xfrm>
+          <a:prstGeom prst="line">
+            <a:avLst/>
+          </a:prstGeom>
+          <a:ln w="12700">
+            <a:solidFill>
+              <a:srgbClr val="B4C7D2"/>
+            </a:solidFill>
+          </a:ln>
+          <a:effectLst/>
+        </p:spPr>
+      </p:cxnSp>
+      <p:cxnSp>
+        <p:nvCxnSpPr>
+          <p:cNvPr id="13" name="C3-E14 line 11" descr="sci-ppt:o011"/>
+          <p:cNvCxnSpPr/>
+          <p:nvPr/>
+        </p:nvCxnSpPr>
+        <p:spPr>
+          <a:xfrm>
+            <a:off x="2304288" y="5312664"/>
+            <a:ext cx="137160" cy="155448"/>
+          </a:xfrm>
+          <a:prstGeom prst="line">
+            <a:avLst/>
+          </a:prstGeom>
+          <a:ln w="12700">
+            <a:solidFill>
+              <a:srgbClr val="B4C7D2"/>
+            </a:solidFill>
+          </a:ln>
+          <a:effectLst/>
+        </p:spPr>
+      </p:cxnSp>
+      <p:cxnSp>
+        <p:nvCxnSpPr>
+          <p:cNvPr id="14" name="C3-E14 line 12" descr="sci-ppt:o012"/>
+          <p:cNvCxnSpPr/>
+          <p:nvPr/>
+        </p:nvCxnSpPr>
+        <p:spPr>
+          <a:xfrm>
+            <a:off x="2487168" y="5312664"/>
+            <a:ext cx="137160" cy="155448"/>
+          </a:xfrm>
+          <a:prstGeom prst="line">
+            <a:avLst/>
+          </a:prstGeom>
+          <a:ln w="12700">
+            <a:solidFill>
+              <a:srgbClr val="B4C7D2"/>
+            </a:solidFill>
+          </a:ln>
+          <a:effectLst/>
+        </p:spPr>
+      </p:cxnSp>
+      <p:cxnSp>
+        <p:nvCxnSpPr>
+          <p:cNvPr id="15" name="C3-E14 line 13" descr="sci-ppt:o013"/>
+          <p:cNvCxnSpPr/>
+          <p:nvPr/>
+        </p:nvCxnSpPr>
+        <p:spPr>
+          <a:xfrm>
+            <a:off x="2670048" y="5312664"/>
+            <a:ext cx="137160" cy="155448"/>
+          </a:xfrm>
+          <a:prstGeom prst="line">
+            <a:avLst/>
+          </a:prstGeom>
+          <a:ln w="12700">
+            <a:solidFill>
+              <a:srgbClr val="B4C7D2"/>
+            </a:solidFill>
+          </a:ln>
+          <a:effectLst/>
+        </p:spPr>
+      </p:cxnSp>
+      <p:cxnSp>
+        <p:nvCxnSpPr>
+          <p:cNvPr id="16" name="C3-E14 line 14" descr="sci-ppt:o014"/>
+          <p:cNvCxnSpPr/>
+          <p:nvPr/>
+        </p:nvCxnSpPr>
+        <p:spPr>
+          <a:xfrm>
+            <a:off x="2852928" y="5312664"/>
+            <a:ext cx="137160" cy="155448"/>
+          </a:xfrm>
+          <a:prstGeom prst="line">
+            <a:avLst/>
+          </a:prstGeom>
+          <a:ln w="12700">
+            <a:solidFill>
+              <a:srgbClr val="B4C7D2"/>
+            </a:solidFill>
+          </a:ln>
+          <a:effectLst/>
+        </p:spPr>
+      </p:cxnSp>
+      <p:cxnSp>
+        <p:nvCxnSpPr>
+          <p:cNvPr id="17" name="C3-E14 line 15" descr="sci-ppt:o015"/>
+          <p:cNvCxnSpPr/>
+          <p:nvPr/>
+        </p:nvCxnSpPr>
+        <p:spPr>
+          <a:xfrm>
+            <a:off x="3035808" y="5312664"/>
+            <a:ext cx="137160" cy="155448"/>
+          </a:xfrm>
+          <a:prstGeom prst="line">
+            <a:avLst/>
+          </a:prstGeom>
+          <a:ln w="12700">
+            <a:solidFill>
+              <a:srgbClr val="B4C7D2"/>
+            </a:solidFill>
+          </a:ln>
+          <a:effectLst/>
+        </p:spPr>
+      </p:cxnSp>
+      <p:cxnSp>
+        <p:nvCxnSpPr>
+          <p:cNvPr id="18" name="C3-E14 line 16" descr="sci-ppt:o016"/>
+          <p:cNvCxnSpPr/>
+          <p:nvPr/>
+        </p:nvCxnSpPr>
+        <p:spPr>
+          <a:xfrm>
+            <a:off x="3218688" y="5312664"/>
+            <a:ext cx="137160" cy="155448"/>
+          </a:xfrm>
+          <a:prstGeom prst="line">
+            <a:avLst/>
+          </a:prstGeom>
+          <a:ln w="12700">
+            <a:solidFill>
+              <a:srgbClr val="B4C7D2"/>
+            </a:solidFill>
+          </a:ln>
+          <a:effectLst/>
+        </p:spPr>
+      </p:cxnSp>
+      <p:cxnSp>
+        <p:nvCxnSpPr>
+          <p:cNvPr id="19" name="C3-E14 line 17" descr="sci-ppt:o017"/>
+          <p:cNvCxnSpPr/>
+          <p:nvPr/>
+        </p:nvCxnSpPr>
+        <p:spPr>
+          <a:xfrm>
+            <a:off x="3401568" y="5312664"/>
+            <a:ext cx="137160" cy="155448"/>
+          </a:xfrm>
+          <a:prstGeom prst="line">
+            <a:avLst/>
+          </a:prstGeom>
+          <a:ln w="12700">
+            <a:solidFill>
+              <a:srgbClr val="B4C7D2"/>
+            </a:solidFill>
+          </a:ln>
+          <a:effectLst/>
+        </p:spPr>
+      </p:cxnSp>
+      <p:cxnSp>
+        <p:nvCxnSpPr>
+          <p:cNvPr id="20" name="C3-E14 line 18" descr="sci-ppt:o018"/>
+          <p:cNvCxnSpPr/>
+          <p:nvPr/>
+        </p:nvCxnSpPr>
+        <p:spPr>
+          <a:xfrm>
+            <a:off x="3584448" y="5312664"/>
+            <a:ext cx="137160" cy="155448"/>
+          </a:xfrm>
+          <a:prstGeom prst="line">
+            <a:avLst/>
+          </a:prstGeom>
+          <a:ln w="12700">
+            <a:solidFill>
+              <a:srgbClr val="B4C7D2"/>
+            </a:solidFill>
+          </a:ln>
+          <a:effectLst/>
+        </p:spPr>
+      </p:cxnSp>
+      <p:cxnSp>
+        <p:nvCxnSpPr>
+          <p:cNvPr id="21" name="C3-E14 line 19" descr="sci-ppt:o019"/>
+          <p:cNvCxnSpPr/>
+          <p:nvPr/>
+        </p:nvCxnSpPr>
+        <p:spPr>
+          <a:xfrm>
+            <a:off x="3767328" y="5312664"/>
+            <a:ext cx="137160" cy="155448"/>
+          </a:xfrm>
+          <a:prstGeom prst="line">
+            <a:avLst/>
+          </a:prstGeom>
+          <a:ln w="12700">
+            <a:solidFill>
+              <a:srgbClr val="B4C7D2"/>
+            </a:solidFill>
+          </a:ln>
+          <a:effectLst/>
+        </p:spPr>
+      </p:cxnSp>
+      <p:cxnSp>
+        <p:nvCxnSpPr>
+          <p:cNvPr id="22" name="C3-E14 line 20" descr="sci-ppt:o020"/>
+          <p:cNvCxnSpPr/>
+          <p:nvPr/>
+        </p:nvCxnSpPr>
+        <p:spPr>
+          <a:xfrm>
+            <a:off x="3950208" y="5312664"/>
+            <a:ext cx="137160" cy="155448"/>
+          </a:xfrm>
+          <a:prstGeom prst="line">
+            <a:avLst/>
+          </a:prstGeom>
+          <a:ln w="12700">
+            <a:solidFill>
+              <a:srgbClr val="B4C7D2"/>
+            </a:solidFill>
+          </a:ln>
+          <a:effectLst/>
+        </p:spPr>
+      </p:cxnSp>
+      <p:cxnSp>
+        <p:nvCxnSpPr>
+          <p:cNvPr id="23" name="C3-E14 line 21" descr="sci-ppt:o021"/>
+          <p:cNvCxnSpPr/>
+          <p:nvPr/>
+        </p:nvCxnSpPr>
+        <p:spPr>
+          <a:xfrm>
+            <a:off x="4133087" y="5312664"/>
+            <a:ext cx="137161" cy="155448"/>
+          </a:xfrm>
+          <a:prstGeom prst="line">
+            <a:avLst/>
+          </a:prstGeom>
+          <a:ln w="12700">
+            <a:solidFill>
+              <a:srgbClr val="B4C7D2"/>
+            </a:solidFill>
+          </a:ln>
+          <a:effectLst/>
+        </p:spPr>
+      </p:cxnSp>
+      <p:cxnSp>
+        <p:nvCxnSpPr>
+          <p:cNvPr id="24" name="C3-E14 line 22" descr="sci-ppt:o022"/>
+          <p:cNvCxnSpPr/>
+          <p:nvPr/>
+        </p:nvCxnSpPr>
+        <p:spPr>
+          <a:xfrm>
+            <a:off x="4315968" y="5312664"/>
+            <a:ext cx="137160" cy="155448"/>
+          </a:xfrm>
+          <a:prstGeom prst="line">
+            <a:avLst/>
+          </a:prstGeom>
+          <a:ln w="12700">
+            <a:solidFill>
+              <a:srgbClr val="B4C7D2"/>
+            </a:solidFill>
+          </a:ln>
+          <a:effectLst/>
+        </p:spPr>
+      </p:cxnSp>
+      <p:cxnSp>
+        <p:nvCxnSpPr>
+          <p:cNvPr id="25" name="C3-E14 line 23" descr="sci-ppt:o023"/>
+          <p:cNvCxnSpPr/>
+          <p:nvPr/>
+        </p:nvCxnSpPr>
+        <p:spPr>
+          <a:xfrm>
+            <a:off x="4498848" y="5312664"/>
+            <a:ext cx="137160" cy="155448"/>
+          </a:xfrm>
+          <a:prstGeom prst="line">
+            <a:avLst/>
+          </a:prstGeom>
+          <a:ln w="12700">
+            <a:solidFill>
+              <a:srgbClr val="B4C7D2"/>
+            </a:solidFill>
+          </a:ln>
+          <a:effectLst/>
+        </p:spPr>
+      </p:cxnSp>
+      <p:cxnSp>
+        <p:nvCxnSpPr>
+          <p:cNvPr id="26" name="C3-E14 line 24" descr="sci-ppt:o024"/>
+          <p:cNvCxnSpPr/>
+          <p:nvPr/>
+        </p:nvCxnSpPr>
+        <p:spPr>
+          <a:xfrm>
+            <a:off x="4681728" y="5312664"/>
+            <a:ext cx="137160" cy="155448"/>
+          </a:xfrm>
+          <a:prstGeom prst="line">
+            <a:avLst/>
+          </a:prstGeom>
+          <a:ln w="12700">
+            <a:solidFill>
+              <a:srgbClr val="B4C7D2"/>
+            </a:solidFill>
+          </a:ln>
+          <a:effectLst/>
+        </p:spPr>
+      </p:cxnSp>
+      <p:cxnSp>
+        <p:nvCxnSpPr>
+          <p:cNvPr id="27" name="C3-E14 line 25" descr="sci-ppt:o025"/>
+          <p:cNvCxnSpPr/>
+          <p:nvPr/>
+        </p:nvCxnSpPr>
+        <p:spPr>
+          <a:xfrm>
+            <a:off x="4864608" y="5312664"/>
+            <a:ext cx="137160" cy="155448"/>
+          </a:xfrm>
+          <a:prstGeom prst="line">
+            <a:avLst/>
+          </a:prstGeom>
+          <a:ln w="12700">
+            <a:solidFill>
+              <a:srgbClr val="B4C7D2"/>
+            </a:solidFill>
+          </a:ln>
+          <a:effectLst/>
+        </p:spPr>
+      </p:cxnSp>
+      <p:cxnSp>
+        <p:nvCxnSpPr>
+          <p:cNvPr id="28" name="C3-E14 line 26" descr="sci-ppt:o026"/>
+          <p:cNvCxnSpPr/>
+          <p:nvPr/>
+        </p:nvCxnSpPr>
+        <p:spPr>
+          <a:xfrm>
+            <a:off x="5047488" y="5312664"/>
+            <a:ext cx="137160" cy="155448"/>
+          </a:xfrm>
+          <a:prstGeom prst="line">
+            <a:avLst/>
+          </a:prstGeom>
+          <a:ln w="12700">
+            <a:solidFill>
+              <a:srgbClr val="B4C7D2"/>
+            </a:solidFill>
+          </a:ln>
+          <a:effectLst/>
+        </p:spPr>
+      </p:cxnSp>
+      <p:cxnSp>
+        <p:nvCxnSpPr>
+          <p:cNvPr id="29" name="C3-E14 line 27" descr="sci-ppt:o027"/>
+          <p:cNvCxnSpPr/>
+          <p:nvPr/>
+        </p:nvCxnSpPr>
+        <p:spPr>
+          <a:xfrm>
+            <a:off x="5230368" y="5312664"/>
+            <a:ext cx="137160" cy="155448"/>
+          </a:xfrm>
+          <a:prstGeom prst="line">
+            <a:avLst/>
+          </a:prstGeom>
+          <a:ln w="12700">
+            <a:solidFill>
+              <a:srgbClr val="B4C7D2"/>
+            </a:solidFill>
+          </a:ln>
+          <a:effectLst/>
+        </p:spPr>
+      </p:cxnSp>
+      <p:cxnSp>
+        <p:nvCxnSpPr>
+          <p:cNvPr id="30" name="C3-E14 line 28" descr="sci-ppt:o028"/>
+          <p:cNvCxnSpPr/>
+          <p:nvPr/>
+        </p:nvCxnSpPr>
+        <p:spPr>
+          <a:xfrm>
+            <a:off x="5413248" y="5312664"/>
+            <a:ext cx="137160" cy="155448"/>
+          </a:xfrm>
+          <a:prstGeom prst="line">
+            <a:avLst/>
+          </a:prstGeom>
+          <a:ln w="12700">
+            <a:solidFill>
+              <a:srgbClr val="B4C7D2"/>
+            </a:solidFill>
+          </a:ln>
+          <a:effectLst/>
+        </p:spPr>
+      </p:cxnSp>
+      <p:cxnSp>
+        <p:nvCxnSpPr>
+          <p:cNvPr id="31" name="C3-E14 line 29" descr="sci-ppt:o029"/>
+          <p:cNvCxnSpPr/>
+          <p:nvPr/>
+        </p:nvCxnSpPr>
+        <p:spPr>
+          <a:xfrm>
+            <a:off x="5596128" y="5312664"/>
+            <a:ext cx="137160" cy="155448"/>
+          </a:xfrm>
+          <a:prstGeom prst="line">
+            <a:avLst/>
+          </a:prstGeom>
+          <a:ln w="12700">
+            <a:solidFill>
+              <a:srgbClr val="B4C7D2"/>
+            </a:solidFill>
+          </a:ln>
+          <a:effectLst/>
+        </p:spPr>
+      </p:cxnSp>
+      <p:cxnSp>
+        <p:nvCxnSpPr>
+          <p:cNvPr id="32" name="C3-E14 line 30" descr="sci-ppt:o030"/>
+          <p:cNvCxnSpPr/>
+          <p:nvPr/>
+        </p:nvCxnSpPr>
+        <p:spPr>
+          <a:xfrm>
+            <a:off x="5779008" y="5312664"/>
+            <a:ext cx="137160" cy="155448"/>
+          </a:xfrm>
+          <a:prstGeom prst="line">
+            <a:avLst/>
+          </a:prstGeom>
+          <a:ln w="12700">
+            <a:solidFill>
+              <a:srgbClr val="B4C7D2"/>
+            </a:solidFill>
+          </a:ln>
+          <a:effectLst/>
+        </p:spPr>
+      </p:cxnSp>
+      <p:cxnSp>
+        <p:nvCxnSpPr>
+          <p:cNvPr id="33" name="C3-E14 line 31" descr="sci-ppt:o031"/>
+          <p:cNvCxnSpPr/>
+          <p:nvPr/>
+        </p:nvCxnSpPr>
+        <p:spPr>
+          <a:xfrm>
+            <a:off x="5961888" y="5312664"/>
+            <a:ext cx="137160" cy="155448"/>
+          </a:xfrm>
+          <a:prstGeom prst="line">
+            <a:avLst/>
+          </a:prstGeom>
+          <a:ln w="12700">
+            <a:solidFill>
+              <a:srgbClr val="B4C7D2"/>
+            </a:solidFill>
+          </a:ln>
+          <a:effectLst/>
+        </p:spPr>
+      </p:cxnSp>
+      <p:cxnSp>
+        <p:nvCxnSpPr>
+          <p:cNvPr id="34" name="C3-E14 line 32" descr="sci-ppt:o032"/>
+          <p:cNvCxnSpPr/>
+          <p:nvPr/>
+        </p:nvCxnSpPr>
+        <p:spPr>
+          <a:xfrm>
+            <a:off x="6144768" y="5312664"/>
+            <a:ext cx="137160" cy="155448"/>
+          </a:xfrm>
+          <a:prstGeom prst="line">
+            <a:avLst/>
+          </a:prstGeom>
+          <a:ln w="12700">
+            <a:solidFill>
+              <a:srgbClr val="B4C7D2"/>
+            </a:solidFill>
+          </a:ln>
+          <a:effectLst/>
+        </p:spPr>
+      </p:cxnSp>
+      <p:cxnSp>
+        <p:nvCxnSpPr>
+          <p:cNvPr id="35" name="C3-E14 line 33" descr="sci-ppt:o033"/>
+          <p:cNvCxnSpPr/>
+          <p:nvPr/>
+        </p:nvCxnSpPr>
+        <p:spPr>
+          <a:xfrm>
+            <a:off x="6327648" y="5312664"/>
+            <a:ext cx="137160" cy="155448"/>
+          </a:xfrm>
+          <a:prstGeom prst="line">
+            <a:avLst/>
+          </a:prstGeom>
+          <a:ln w="12700">
+            <a:solidFill>
+              <a:srgbClr val="B4C7D2"/>
+            </a:solidFill>
+          </a:ln>
+          <a:effectLst/>
+        </p:spPr>
+      </p:cxnSp>
+      <p:cxnSp>
+        <p:nvCxnSpPr>
+          <p:cNvPr id="36" name="C3-E14 line 34" descr="sci-ppt:o034"/>
+          <p:cNvCxnSpPr/>
+          <p:nvPr/>
+        </p:nvCxnSpPr>
+        <p:spPr>
+          <a:xfrm>
+            <a:off x="6510528" y="5312664"/>
+            <a:ext cx="137160" cy="155448"/>
+          </a:xfrm>
+          <a:prstGeom prst="line">
+            <a:avLst/>
+          </a:prstGeom>
+          <a:ln w="12700">
+            <a:solidFill>
+              <a:srgbClr val="B4C7D2"/>
+            </a:solidFill>
+          </a:ln>
+          <a:effectLst/>
+        </p:spPr>
+      </p:cxnSp>
+      <p:cxnSp>
+        <p:nvCxnSpPr>
+          <p:cNvPr id="37" name="C3-E14 line 35" descr="sci-ppt:o035"/>
+          <p:cNvCxnSpPr/>
+          <p:nvPr/>
+        </p:nvCxnSpPr>
+        <p:spPr>
+          <a:xfrm>
+            <a:off x="6693408" y="5312664"/>
+            <a:ext cx="137160" cy="155448"/>
+          </a:xfrm>
+          <a:prstGeom prst="line">
+            <a:avLst/>
+          </a:prstGeom>
+          <a:ln w="12700">
+            <a:solidFill>
+              <a:srgbClr val="B4C7D2"/>
+            </a:solidFill>
+          </a:ln>
+          <a:effectLst/>
+        </p:spPr>
+      </p:cxnSp>
+      <p:cxnSp>
+        <p:nvCxnSpPr>
+          <p:cNvPr id="38" name="C3-E14 line 36" descr="sci-ppt:o036"/>
+          <p:cNvCxnSpPr/>
+          <p:nvPr/>
+        </p:nvCxnSpPr>
+        <p:spPr>
+          <a:xfrm>
+            <a:off x="6876288" y="5312664"/>
+            <a:ext cx="137160" cy="155448"/>
+          </a:xfrm>
+          <a:prstGeom prst="line">
+            <a:avLst/>
+          </a:prstGeom>
+          <a:ln w="12700">
+            <a:solidFill>
+              <a:srgbClr val="B4C7D2"/>
+            </a:solidFill>
+          </a:ln>
+          <a:effectLst/>
+        </p:spPr>
+      </p:cxnSp>
+      <p:cxnSp>
+        <p:nvCxnSpPr>
+          <p:cNvPr id="39" name="C3-E14 line 37" descr="sci-ppt:o037"/>
+          <p:cNvCxnSpPr/>
+          <p:nvPr/>
+        </p:nvCxnSpPr>
+        <p:spPr>
+          <a:xfrm>
+            <a:off x="7059168" y="5312664"/>
+            <a:ext cx="137160" cy="155448"/>
+          </a:xfrm>
+          <a:prstGeom prst="line">
+            <a:avLst/>
+          </a:prstGeom>
+          <a:ln w="12700">
+            <a:solidFill>
+              <a:srgbClr val="B4C7D2"/>
+            </a:solidFill>
+          </a:ln>
+          <a:effectLst/>
+        </p:spPr>
+      </p:cxnSp>
+      <p:sp>
+        <p:nvSpPr>
+          <p:cNvPr id="40" name="C3-E14 ellipse 38" descr="sci-ppt:o038"/>
+          <p:cNvSpPr/>
+          <p:nvPr/>
+        </p:nvSpPr>
+        <p:spPr>
+          <a:xfrm>
+            <a:off x="2011680" y="2651760"/>
+            <a:ext cx="1828800" cy="1828800"/>
+          </a:xfrm>
+          <a:prstGeom prst="ellipse">
+            <a:avLst/>
+          </a:prstGeom>
+          <a:solidFill>
+            <a:srgbClr val="0C1820"/>
+          </a:solidFill>
+          <a:ln w="27940">
+            <a:solidFill>
+              <a:srgbClr val="F2B880"/>
+            </a:solidFill>
+          </a:ln>
+          <a:effectLst/>
+        </p:spPr>
         <p:txBody>
           <a:bodyPr rtlCol="0" anchor="ctr"/>
           <a:lstStyle/>
@@ -3200,14 +4004,14 @@
       </p:sp>
       <p:sp>
         <p:nvSpPr>
-          <p:cNvPr id="5" name="C3-E14 text 3" descr="sci-ppt:o003"/>
+          <p:cNvPr id="41" name="C3-E14 text 39" descr="sci-ppt:o039"/>
           <p:cNvSpPr txBox="1"/>
           <p:nvPr/>
         </p:nvSpPr>
         <p:spPr>
           <a:xfrm>
-            <a:off x="2423160" y="2057400"/>
-            <a:ext cx="1371600" cy="365760"/>
+            <a:off x="2286000" y="3429000"/>
+            <a:ext cx="1280160" cy="239395"/>
           </a:xfrm>
           <a:prstGeom prst="rect">
             <a:avLst/>
@@ -3216,7 +4020,79 @@
           <a:effectLst/>
         </p:spPr>
         <p:txBody>
-          <a:bodyPr wrap="square" lIns="27432" rIns="27432" tIns="18288" bIns="18288" anchor="ctr">
+          <a:bodyPr wrap="none" lIns="18288" rIns="18288" tIns="18288" bIns="18288" anchor="t">
+            <a:spAutoFit/>
+          </a:bodyPr>
+          <a:lstStyle/>
+          <a:p>
+            <a:pPr algn="ctr">
+              <a:spcAft>
+                <a:spcPts val="0"/>
+              </a:spcAft>
+            </a:pPr>
+            <a:r>
+              <a:rPr sz="1250" b="0" i="0">
+                <a:solidFill>
+                  <a:srgbClr val="B4C7D2"/>
+                </a:solidFill>
+                <a:latin typeface="Arial"/>
+              </a:rPr>
+              <a:t>gas</a:t>
+            </a:r>
+          </a:p>
+        </p:txBody>
+      </p:sp>
+      <p:sp>
+        <p:nvSpPr>
+          <p:cNvPr id="42" name="C3-E14 ellipse 40" descr="sci-ppt:o040"/>
+          <p:cNvSpPr/>
+          <p:nvPr/>
+        </p:nvSpPr>
+        <p:spPr>
+          <a:xfrm>
+            <a:off x="3368262" y="2734831"/>
+            <a:ext cx="164592" cy="164592"/>
+          </a:xfrm>
+          <a:prstGeom prst="ellipse">
+            <a:avLst/>
+          </a:prstGeom>
+          <a:solidFill>
+            <a:srgbClr val="F2B880"/>
+          </a:solidFill>
+          <a:ln w="12700">
+            <a:solidFill>
+              <a:srgbClr val="F2B880"/>
+            </a:solidFill>
+          </a:ln>
+          <a:effectLst/>
+        </p:spPr>
+        <p:txBody>
+          <a:bodyPr rtlCol="0" anchor="ctr"/>
+          <a:lstStyle/>
+          <a:p>
+            <a:pPr algn="ctr"/>
+          </a:p>
+        </p:txBody>
+      </p:sp>
+      <p:sp>
+        <p:nvSpPr>
+          <p:cNvPr id="43" name="C3-E14 text 41" descr="sci-ppt:o041"/>
+          <p:cNvSpPr txBox="1"/>
+          <p:nvPr/>
+        </p:nvSpPr>
+        <p:spPr>
+          <a:xfrm>
+            <a:off x="640080" y="1920240"/>
+            <a:ext cx="3291840" cy="223900"/>
+          </a:xfrm>
+          <a:prstGeom prst="rect">
+            <a:avLst/>
+          </a:prstGeom>
+          <a:noFill/>
+          <a:effectLst/>
+        </p:spPr>
+        <p:txBody>
+          <a:bodyPr wrap="none" lIns="18288" rIns="18288" tIns="18288" bIns="18288" anchor="t">
             <a:spAutoFit/>
           </a:bodyPr>
           <a:lstStyle/>
@@ -3227,27 +4103,51 @@
               </a:spcAft>
             </a:pPr>
             <a:r>
-              <a:rPr sz="1700" b="0" i="0">
+              <a:rPr sz="1150" b="1" i="0">
                 <a:solidFill>
-                  <a:srgbClr val="E7F0F3"/>
+                  <a:srgbClr val="F2B880"/>
                 </a:solidFill>
                 <a:latin typeface="Arial"/>
               </a:rPr>
-              <a:t>p_g</a:t>
-            </a:r>
-          </a:p>
-        </p:txBody>
-      </p:sp>
-      <p:sp>
-        <p:nvSpPr>
-          <p:cNvPr id="6" name="C3-E14 text 4" descr="sci-ppt:o004"/>
+              <a:t>X: material point on Γ</a:t>
+            </a:r>
+          </a:p>
+        </p:txBody>
+      </p:sp>
+      <p:cxnSp>
+        <p:nvCxnSpPr>
+          <p:cNvPr id="44" name="C3-E14 arrow 42" descr="sci-ppt:o042"/>
+          <p:cNvCxnSpPr/>
+          <p:nvPr/>
+        </p:nvCxnSpPr>
+        <p:spPr>
+          <a:xfrm flipV="1">
+            <a:off x="3450558" y="2314207"/>
+            <a:ext cx="685800" cy="502920"/>
+          </a:xfrm>
+          <a:prstGeom prst="line">
+            <a:avLst/>
+          </a:prstGeom>
+          <a:ln w="38100">
+            <a:solidFill>
+              <a:srgbClr val="F2B880"/>
+            </a:solidFill>
+            <a:headEnd type="none" w="med" len="med"/>
+            <a:tailEnd type="triangle" w="med" len="med"/>
+          </a:ln>
+          <a:effectLst/>
+        </p:spPr>
+      </p:cxnSp>
+      <p:sp>
+        <p:nvSpPr>
+          <p:cNvPr id="45" name="C3-E14 text 43" descr="sci-ppt:o043"/>
           <p:cNvSpPr txBox="1"/>
           <p:nvPr/>
         </p:nvSpPr>
         <p:spPr>
           <a:xfrm>
-            <a:off x="4663440" y="1874519"/>
-            <a:ext cx="4297680" cy="548640"/>
+            <a:off x="4182078" y="2268487"/>
+            <a:ext cx="2286000" cy="231648"/>
           </a:xfrm>
           <a:prstGeom prst="rect">
             <a:avLst/>
@@ -3256,7 +4156,7 @@
           <a:effectLst/>
         </p:spPr>
         <p:txBody>
-          <a:bodyPr wrap="square" lIns="27432" rIns="27432" tIns="18288" bIns="18288" anchor="ctr">
+          <a:bodyPr wrap="none" lIns="18288" rIns="18288" tIns="18288" bIns="18288" anchor="t">
             <a:spAutoFit/>
           </a:bodyPr>
           <a:lstStyle/>
@@ -3267,32 +4167,32 @@
               </a:spcAft>
             </a:pPr>
             <a:r>
-              <a:rPr sz="1900" b="0" i="0">
+              <a:rPr sz="1200" b="1" i="0">
                 <a:solidFill>
-                  <a:srgbClr val="E7F0F3"/>
+                  <a:srgbClr val="F2B880"/>
                 </a:solidFill>
                 <a:latin typeface="Arial"/>
               </a:rPr>
-              <a:t>Liquid Ω(t): u = ∇φ</a:t>
+              <a:t>dX/dt = u(X, t)</a:t>
             </a:r>
           </a:p>
         </p:txBody>
       </p:sp>
       <p:cxnSp>
         <p:nvCxnSpPr>
-          <p:cNvPr id="7" name="C3-E14 arrow 5" descr="sci-ppt:o005"/>
+          <p:cNvPr id="46" name="C3-E14 arrow 44" descr="sci-ppt:o044"/>
           <p:cNvCxnSpPr/>
           <p:nvPr/>
         </p:nvCxnSpPr>
         <p:spPr>
           <a:xfrm flipH="1">
-            <a:off x="3520440" y="2240280"/>
-            <a:ext cx="502920" cy="0"/>
+            <a:off x="2901918" y="2862847"/>
+            <a:ext cx="457200" cy="365760"/>
           </a:xfrm>
           <a:prstGeom prst="line">
             <a:avLst/>
           </a:prstGeom>
-          <a:ln w="25400">
+          <a:ln w="38100">
             <a:solidFill>
               <a:srgbClr val="8EDBD4"/>
             </a:solidFill>
@@ -3304,14 +4204,14 @@
       </p:cxnSp>
       <p:sp>
         <p:nvSpPr>
-          <p:cNvPr id="8" name="C3-E14 text 6" descr="sci-ppt:o006"/>
+          <p:cNvPr id="47" name="C3-E14 text 45" descr="sci-ppt:o045"/>
           <p:cNvSpPr txBox="1"/>
           <p:nvPr/>
         </p:nvSpPr>
         <p:spPr>
           <a:xfrm>
-            <a:off x="3657600" y="2606040"/>
-            <a:ext cx="4572000" cy="365760"/>
+            <a:off x="640080" y="2286000"/>
+            <a:ext cx="3291840" cy="223900"/>
           </a:xfrm>
           <a:prstGeom prst="rect">
             <a:avLst/>
@@ -3320,7 +4220,7 @@
           <a:effectLst/>
         </p:spPr>
         <p:txBody>
-          <a:bodyPr wrap="square" lIns="27432" rIns="27432" tIns="18288" bIns="18288" anchor="ctr">
+          <a:bodyPr wrap="none" lIns="18288" rIns="18288" tIns="18288" bIns="18288" anchor="t">
             <a:spAutoFit/>
           </a:bodyPr>
           <a:lstStyle/>
@@ -3331,51 +4231,131 @@
               </a:spcAft>
             </a:pPr>
             <a:r>
-              <a:rPr sz="1600" b="0" i="0">
+              <a:rPr sz="1150" b="1" i="0">
+                <a:solidFill>
+                  <a:srgbClr val="8EDBD4"/>
+                </a:solidFill>
+                <a:latin typeface="Arial"/>
+              </a:rPr>
+              <a:t>Vₙ = ∂ₙφ  (normal speed)</a:t>
+            </a:r>
+          </a:p>
+        </p:txBody>
+      </p:sp>
+      <p:cxnSp>
+        <p:nvCxnSpPr>
+          <p:cNvPr id="48" name="C3-E14 arrow 46" descr="sci-ppt:o046"/>
+          <p:cNvCxnSpPr/>
+          <p:nvPr/>
+        </p:nvCxnSpPr>
+        <p:spPr>
+          <a:xfrm flipV="1">
+            <a:off x="4754880" y="4572000"/>
+            <a:ext cx="0" cy="457200"/>
+          </a:xfrm>
+          <a:prstGeom prst="line">
+            <a:avLst/>
+          </a:prstGeom>
+          <a:ln w="38100">
+            <a:solidFill>
+              <a:srgbClr val="F28BA0"/>
+            </a:solidFill>
+            <a:headEnd type="none" w="med" len="med"/>
+            <a:tailEnd type="triangle" w="med" len="med"/>
+          </a:ln>
+          <a:effectLst/>
+        </p:spPr>
+      </p:cxnSp>
+      <p:sp>
+        <p:nvSpPr>
+          <p:cNvPr id="49" name="C3-E14 text 47" descr="sci-ppt:o047"/>
+          <p:cNvSpPr txBox="1"/>
+          <p:nvPr/>
+        </p:nvSpPr>
+        <p:spPr>
+          <a:xfrm>
+            <a:off x="4892040" y="4343400"/>
+            <a:ext cx="2651760" cy="231648"/>
+          </a:xfrm>
+          <a:prstGeom prst="rect">
+            <a:avLst/>
+          </a:prstGeom>
+          <a:noFill/>
+          <a:effectLst/>
+        </p:spPr>
+        <p:txBody>
+          <a:bodyPr wrap="none" lIns="18288" rIns="18288" tIns="18288" bIns="18288" anchor="t">
+            <a:spAutoFit/>
+          </a:bodyPr>
+          <a:lstStyle/>
+          <a:p>
+            <a:pPr algn="l">
+              <a:spcAft>
+                <a:spcPts val="0"/>
+              </a:spcAft>
+            </a:pPr>
+            <a:r>
+              <a:rPr sz="1200" b="1" i="0">
+                <a:solidFill>
+                  <a:srgbClr val="F28BA0"/>
+                </a:solidFill>
+                <a:latin typeface="Arial"/>
+              </a:rPr>
+              <a:t>wall: ∂ₙφ = V_w·n</a:t>
+            </a:r>
+          </a:p>
+        </p:txBody>
+      </p:sp>
+      <p:sp>
+        <p:nvSpPr>
+          <p:cNvPr id="50" name="C3-E14 text 48" descr="sci-ppt:o048"/>
+          <p:cNvSpPr txBox="1"/>
+          <p:nvPr/>
+        </p:nvSpPr>
+        <p:spPr>
+          <a:xfrm>
+            <a:off x="4846320" y="1051560"/>
+            <a:ext cx="2651760" cy="231648"/>
+          </a:xfrm>
+          <a:prstGeom prst="rect">
+            <a:avLst/>
+          </a:prstGeom>
+          <a:noFill/>
+          <a:effectLst/>
+        </p:spPr>
+        <p:txBody>
+          <a:bodyPr wrap="none" lIns="18288" rIns="18288" tIns="18288" bIns="18288" anchor="t">
+            <a:spAutoFit/>
+          </a:bodyPr>
+          <a:lstStyle/>
+          <a:p>
+            <a:pPr algn="l">
+              <a:spcAft>
+                <a:spcPts val="0"/>
+              </a:spcAft>
+            </a:pPr>
+            <a:r>
+              <a:rPr sz="1200" b="1" i="0">
                 <a:solidFill>
                   <a:srgbClr val="E7F0F3"/>
                 </a:solidFill>
                 <a:latin typeface="Arial"/>
               </a:rPr>
-              <a:t>n: liquid → cavity gas</a:t>
-            </a:r>
-          </a:p>
-        </p:txBody>
-      </p:sp>
-      <p:cxnSp>
-        <p:nvCxnSpPr>
-          <p:cNvPr id="9" name="C3-E14 arrow 7" descr="sci-ppt:o007"/>
-          <p:cNvCxnSpPr/>
-          <p:nvPr/>
-        </p:nvCxnSpPr>
-        <p:spPr>
-          <a:xfrm>
-            <a:off x="8778240" y="2011680"/>
-            <a:ext cx="822960" cy="0"/>
-          </a:xfrm>
-          <a:prstGeom prst="line">
-            <a:avLst/>
-          </a:prstGeom>
-          <a:ln w="25400">
-            <a:solidFill>
-              <a:srgbClr val="8EDBD4"/>
-            </a:solidFill>
-            <a:headEnd type="none" w="med" len="med"/>
-            <a:tailEnd type="triangle" w="med" len="med"/>
-          </a:ln>
-          <a:effectLst/>
-        </p:spPr>
-      </p:cxnSp>
-      <p:sp>
-        <p:nvSpPr>
-          <p:cNvPr id="10" name="C3-E14 text 8" descr="sci-ppt:o008"/>
+              <a:t>far field: φ → 0</a:t>
+            </a:r>
+          </a:p>
+        </p:txBody>
+      </p:sp>
+      <p:sp>
+        <p:nvSpPr>
+          <p:cNvPr id="51" name="C3-E14 text 49" descr="sci-ppt:o049"/>
           <p:cNvSpPr txBox="1"/>
           <p:nvPr/>
         </p:nvSpPr>
         <p:spPr>
           <a:xfrm>
-            <a:off x="7863840" y="1188720"/>
-            <a:ext cx="2743200" cy="365760"/>
+            <a:off x="548640" y="1005840"/>
+            <a:ext cx="3474720" cy="231648"/>
           </a:xfrm>
           <a:prstGeom prst="rect">
             <a:avLst/>
@@ -3384,7 +4364,7 @@
           <a:effectLst/>
         </p:spPr>
         <p:txBody>
-          <a:bodyPr wrap="square" lIns="27432" rIns="27432" tIns="18288" bIns="18288" anchor="ctr">
+          <a:bodyPr wrap="none" lIns="18288" rIns="18288" tIns="18288" bIns="18288" anchor="t">
             <a:spAutoFit/>
           </a:bodyPr>
           <a:lstStyle/>
@@ -3395,39 +4375,127 @@
               </a:spcAft>
             </a:pPr>
             <a:r>
-              <a:rPr sz="1700" b="0" i="0">
+              <a:rPr sz="1200" b="1" i="0">
+                <a:solidFill>
+                  <a:srgbClr val="F2B880"/>
+                </a:solidFill>
+                <a:latin typeface="Arial"/>
+              </a:rPr>
+              <a:t>initial data: (Γ, φ_Γ) at t = 0 = (Γ₀, φ₀)</a:t>
+            </a:r>
+          </a:p>
+        </p:txBody>
+      </p:sp>
+      <p:sp>
+        <p:nvSpPr>
+          <p:cNvPr id="52" name="C3-E14 round_rect 50" descr="sci-ppt:o050"/>
+          <p:cNvSpPr/>
+          <p:nvPr/>
+        </p:nvSpPr>
+        <p:spPr>
+          <a:xfrm>
+            <a:off x="7863840" y="914400"/>
+            <a:ext cx="3977639" cy="4846320"/>
+          </a:xfrm>
+          <a:prstGeom prst="roundRect">
+            <a:avLst/>
+          </a:prstGeom>
+          <a:solidFill>
+            <a:srgbClr val="213E4B"/>
+          </a:solidFill>
+          <a:ln w="20320">
+            <a:solidFill>
+              <a:srgbClr val="8EDBD4"/>
+            </a:solidFill>
+          </a:ln>
+          <a:effectLst/>
+        </p:spPr>
+        <p:txBody>
+          <a:bodyPr rtlCol="0" anchor="ctr"/>
+          <a:lstStyle/>
+          <a:p>
+            <a:pPr algn="ctr"/>
+          </a:p>
+        </p:txBody>
+      </p:sp>
+      <p:sp>
+        <p:nvSpPr>
+          <p:cNvPr id="53" name="C3-E14 text 51" descr="sci-ppt:o051"/>
+          <p:cNvSpPr txBox="1"/>
+          <p:nvPr/>
+        </p:nvSpPr>
+        <p:spPr>
+          <a:xfrm>
+            <a:off x="7973567" y="969264"/>
+            <a:ext cx="3758183" cy="247142"/>
+          </a:xfrm>
+          <a:prstGeom prst="rect">
+            <a:avLst/>
+          </a:prstGeom>
+          <a:noFill/>
+          <a:effectLst/>
+        </p:spPr>
+        <p:txBody>
+          <a:bodyPr wrap="none" lIns="18288" rIns="18288" tIns="18288" bIns="18288" anchor="t">
+            <a:spAutoFit/>
+          </a:bodyPr>
+          <a:lstStyle/>
+          <a:p>
+            <a:pPr algn="l">
+              <a:spcAft>
+                <a:spcPts val="0"/>
+              </a:spcAft>
+            </a:pPr>
+            <a:r>
+              <a:rPr sz="1300" b="1" i="0">
+                <a:solidFill>
+                  <a:srgbClr val="8EDBD4"/>
+                </a:solidFill>
+                <a:latin typeface="Arial"/>
+              </a:rPr>
+              <a:t>Four things a jet prediction needs</a:t>
+            </a:r>
+          </a:p>
+        </p:txBody>
+      </p:sp>
+      <p:sp>
+        <p:nvSpPr>
+          <p:cNvPr id="54" name="C3-E14 text 52" descr="sci-ppt:o052"/>
+          <p:cNvSpPr txBox="1"/>
+          <p:nvPr/>
+        </p:nvSpPr>
+        <p:spPr>
+          <a:xfrm>
+            <a:off x="8202168" y="1463040"/>
+            <a:ext cx="3547871" cy="626745"/>
+          </a:xfrm>
+          <a:prstGeom prst="rect">
+            <a:avLst/>
+          </a:prstGeom>
+          <a:noFill/>
+          <a:effectLst/>
+        </p:spPr>
+        <p:txBody>
+          <a:bodyPr wrap="none" lIns="18288" rIns="18288" tIns="18288" bIns="18288" anchor="t">
+            <a:spAutoFit/>
+          </a:bodyPr>
+          <a:lstStyle/>
+          <a:p>
+            <a:pPr algn="l">
+              <a:spcAft>
+                <a:spcPts val="0"/>
+              </a:spcAft>
+            </a:pPr>
+            <a:r>
+              <a:rPr sz="1250" b="0" i="0">
                 <a:solidFill>
                   <a:srgbClr val="E7F0F3"/>
                 </a:solidFill>
                 <a:latin typeface="Arial"/>
               </a:rPr>
-              <a:t>Outlet / meniscus</a:t>
-            </a:r>
-          </a:p>
-        </p:txBody>
-      </p:sp>
-      <p:sp>
-        <p:nvSpPr>
-          <p:cNvPr id="11" name="C3-E14 text 9" descr="sci-ppt:o009"/>
-          <p:cNvSpPr txBox="1"/>
-          <p:nvPr/>
-        </p:nvSpPr>
-        <p:spPr>
-          <a:xfrm>
-            <a:off x="1005840" y="594360"/>
-            <a:ext cx="10058400" cy="365760"/>
-          </a:xfrm>
-          <a:prstGeom prst="rect">
-            <a:avLst/>
-          </a:prstGeom>
-          <a:noFill/>
-          <a:effectLst/>
-        </p:spPr>
-        <p:txBody>
-          <a:bodyPr wrap="square" lIns="27432" rIns="27432" tIns="18288" bIns="18288" anchor="ctr">
-            <a:spAutoFit/>
-          </a:bodyPr>
-          <a:lstStyle/>
+              <a:t>Kinematic condition: the surface moves</a:t>
+            </a:r>
+          </a:p>
           <a:p>
             <a:pPr algn="l">
               <a:spcAft>
@@ -3435,61 +4503,15 @@
               </a:spcAft>
             </a:pPr>
             <a:r>
-              <a:rPr sz="1800" b="0" i="0">
+              <a:rPr sz="1250" b="0" i="0">
                 <a:solidFill>
-                  <a:srgbClr val="8EDBD4"/>
+                  <a:srgbClr val="E7F0F3"/>
                 </a:solidFill>
                 <a:latin typeface="Arial"/>
               </a:rPr>
-              <a:t>Walls, cavity and outlet are distinct boundaries.</a:t>
-            </a:r>
-          </a:p>
-        </p:txBody>
-      </p:sp>
-      <p:cxnSp>
-        <p:nvCxnSpPr>
-          <p:cNvPr id="12" name="C3-E14 line 10" descr="sci-ppt:o010"/>
-          <p:cNvCxnSpPr/>
-          <p:nvPr/>
-        </p:nvCxnSpPr>
-        <p:spPr>
-          <a:xfrm>
-            <a:off x="274320" y="3977639"/>
-            <a:ext cx="11612880" cy="0"/>
-          </a:xfrm>
-          <a:prstGeom prst="line">
-            <a:avLst/>
-          </a:prstGeom>
-          <a:ln w="12700">
-            <a:solidFill>
-              <a:srgbClr val="405967"/>
-            </a:solidFill>
-          </a:ln>
-          <a:effectLst/>
-        </p:spPr>
-      </p:cxnSp>
-      <p:sp>
-        <p:nvSpPr>
-          <p:cNvPr id="13" name="C3-E14 text 11" descr="sci-ppt:o011"/>
-          <p:cNvSpPr txBox="1"/>
-          <p:nvPr/>
-        </p:nvSpPr>
-        <p:spPr>
-          <a:xfrm>
-            <a:off x="320040" y="4096512"/>
-            <a:ext cx="5715000" cy="246888"/>
-          </a:xfrm>
-          <a:prstGeom prst="rect">
-            <a:avLst/>
-          </a:prstGeom>
-          <a:noFill/>
-          <a:effectLst/>
-        </p:spPr>
-        <p:txBody>
-          <a:bodyPr wrap="square" lIns="27432" rIns="27432" tIns="18288" bIns="18288" anchor="ctr">
-            <a:spAutoFit/>
-          </a:bodyPr>
-          <a:lstStyle/>
+              <a:t>with the liquid, dX/dt = u(X, t), and Vₙ =</a:t>
+            </a:r>
+          </a:p>
           <a:p>
             <a:pPr algn="l">
               <a:spcAft>
@@ -3497,27 +4519,59 @@
               </a:spcAft>
             </a:pPr>
             <a:r>
-              <a:rPr sz="1150" b="0" i="0">
+              <a:rPr sz="1250" b="0" i="0">
                 <a:solidFill>
-                  <a:srgbClr val="B4C7D2"/>
+                  <a:srgbClr val="E7F0F3"/>
                 </a:solidFill>
                 <a:latin typeface="Arial"/>
               </a:rPr>
-              <a:t>• Γ, Γ₀: meniscus and cavity shapes</a:t>
-            </a:r>
-          </a:p>
-        </p:txBody>
-      </p:sp>
-      <p:sp>
-        <p:nvSpPr>
-          <p:cNvPr id="14" name="C3-E14 text 12" descr="sci-ppt:o012"/>
+              <a:t>∂ₙφ.</a:t>
+            </a:r>
+          </a:p>
+        </p:txBody>
+      </p:sp>
+      <p:sp>
+        <p:nvSpPr>
+          <p:cNvPr id="55" name="C3-E14 ellipse 53" descr="sci-ppt:o053"/>
+          <p:cNvSpPr/>
+          <p:nvPr/>
+        </p:nvSpPr>
+        <p:spPr>
+          <a:xfrm>
+            <a:off x="8033004" y="1520317"/>
+            <a:ext cx="82296" cy="82296"/>
+          </a:xfrm>
+          <a:prstGeom prst="ellipse">
+            <a:avLst/>
+          </a:prstGeom>
+          <a:solidFill>
+            <a:srgbClr val="8EDBD4"/>
+          </a:solidFill>
+          <a:ln w="12700">
+            <a:solidFill>
+              <a:srgbClr val="8EDBD4"/>
+            </a:solidFill>
+          </a:ln>
+          <a:effectLst/>
+        </p:spPr>
+        <p:txBody>
+          <a:bodyPr rtlCol="0" anchor="ctr"/>
+          <a:lstStyle/>
+          <a:p>
+            <a:pPr algn="ctr"/>
+          </a:p>
+        </p:txBody>
+      </p:sp>
+      <p:sp>
+        <p:nvSpPr>
+          <p:cNvPr id="56" name="C3-E14 text 54" descr="sci-ppt:o054"/>
           <p:cNvSpPr txBox="1"/>
           <p:nvPr/>
         </p:nvSpPr>
         <p:spPr>
           <a:xfrm>
-            <a:off x="6217920" y="4096512"/>
-            <a:ext cx="5715000" cy="246888"/>
+            <a:off x="8202168" y="2135505"/>
+            <a:ext cx="3547871" cy="433070"/>
           </a:xfrm>
           <a:prstGeom prst="rect">
             <a:avLst/>
@@ -3526,7 +4580,7 @@
           <a:effectLst/>
         </p:spPr>
         <p:txBody>
-          <a:bodyPr wrap="square" lIns="27432" rIns="27432" tIns="18288" bIns="18288" anchor="ctr">
+          <a:bodyPr wrap="none" lIns="18288" rIns="18288" tIns="18288" bIns="18288" anchor="t">
             <a:spAutoFit/>
           </a:bodyPr>
           <a:lstStyle/>
@@ -3537,39 +4591,15 @@
               </a:spcAft>
             </a:pPr>
             <a:r>
-              <a:rPr sz="1150" b="0" i="0">
+              <a:rPr sz="1250" b="0" i="0">
                 <a:solidFill>
-                  <a:srgbClr val="B4C7D2"/>
+                  <a:srgbClr val="E7F0F3"/>
                 </a:solidFill>
                 <a:latin typeface="Arial"/>
               </a:rPr>
-              <a:t>• X moves with u</a:t>
-            </a:r>
-          </a:p>
-        </p:txBody>
-      </p:sp>
-      <p:sp>
-        <p:nvSpPr>
-          <p:cNvPr id="15" name="C3-E14 text 13" descr="sci-ppt:o013"/>
-          <p:cNvSpPr txBox="1"/>
-          <p:nvPr/>
-        </p:nvSpPr>
-        <p:spPr>
-          <a:xfrm>
-            <a:off x="320040" y="4329684"/>
-            <a:ext cx="5715000" cy="246888"/>
-          </a:xfrm>
-          <a:prstGeom prst="rect">
-            <a:avLst/>
-          </a:prstGeom>
-          <a:noFill/>
-          <a:effectLst/>
-        </p:spPr>
-        <p:txBody>
-          <a:bodyPr wrap="square" lIns="27432" rIns="27432" tIns="18288" bIns="18288" anchor="ctr">
-            <a:spAutoFit/>
-          </a:bodyPr>
-          <a:lstStyle/>
+              <a:t>Wall condition: the liquid cannot pass</a:t>
+            </a:r>
+          </a:p>
           <a:p>
             <a:pPr algn="l">
               <a:spcAft>
@@ -3577,27 +4607,59 @@
               </a:spcAft>
             </a:pPr>
             <a:r>
-              <a:rPr sz="1150" b="0" i="0">
+              <a:rPr sz="1250" b="0" i="0">
                 <a:solidFill>
-                  <a:srgbClr val="B4C7D2"/>
+                  <a:srgbClr val="E7F0F3"/>
                 </a:solidFill>
                 <a:latin typeface="Arial"/>
               </a:rPr>
-              <a:t>• n liquid → gas or solid</a:t>
-            </a:r>
-          </a:p>
-        </p:txBody>
-      </p:sp>
-      <p:sp>
-        <p:nvSpPr>
-          <p:cNvPr id="16" name="C3-E14 text 14" descr="sci-ppt:o014"/>
+              <a:t>through a moving wall, ∂ₙφ = V_w·n.</a:t>
+            </a:r>
+          </a:p>
+        </p:txBody>
+      </p:sp>
+      <p:sp>
+        <p:nvSpPr>
+          <p:cNvPr id="57" name="C3-E14 ellipse 55" descr="sci-ppt:o055"/>
+          <p:cNvSpPr/>
+          <p:nvPr/>
+        </p:nvSpPr>
+        <p:spPr>
+          <a:xfrm>
+            <a:off x="8033004" y="2192782"/>
+            <a:ext cx="82296" cy="82296"/>
+          </a:xfrm>
+          <a:prstGeom prst="ellipse">
+            <a:avLst/>
+          </a:prstGeom>
+          <a:solidFill>
+            <a:srgbClr val="8EDBD4"/>
+          </a:solidFill>
+          <a:ln w="12700">
+            <a:solidFill>
+              <a:srgbClr val="8EDBD4"/>
+            </a:solidFill>
+          </a:ln>
+          <a:effectLst/>
+        </p:spPr>
+        <p:txBody>
+          <a:bodyPr rtlCol="0" anchor="ctr"/>
+          <a:lstStyle/>
+          <a:p>
+            <a:pPr algn="ctr"/>
+          </a:p>
+        </p:txBody>
+      </p:sp>
+      <p:sp>
+        <p:nvSpPr>
+          <p:cNvPr id="58" name="C3-E14 text 56" descr="sci-ppt:o056"/>
           <p:cNvSpPr txBox="1"/>
           <p:nvPr/>
         </p:nvSpPr>
         <p:spPr>
           <a:xfrm>
-            <a:off x="6217920" y="4329684"/>
-            <a:ext cx="5715000" cy="246888"/>
+            <a:off x="8202168" y="2614294"/>
+            <a:ext cx="3547871" cy="433070"/>
           </a:xfrm>
           <a:prstGeom prst="rect">
             <a:avLst/>
@@ -3606,7 +4668,7 @@
           <a:effectLst/>
         </p:spPr>
         <p:txBody>
-          <a:bodyPr wrap="square" lIns="27432" rIns="27432" tIns="18288" bIns="18288" anchor="ctr">
+          <a:bodyPr wrap="none" lIns="18288" rIns="18288" tIns="18288" bIns="18288" anchor="t">
             <a:spAutoFit/>
           </a:bodyPr>
           <a:lstStyle/>
@@ -3617,39 +4679,15 @@
               </a:spcAft>
             </a:pPr>
             <a:r>
-              <a:rPr sz="1150" b="0" i="0">
+              <a:rPr sz="1250" b="0" i="0">
                 <a:solidFill>
-                  <a:srgbClr val="B4C7D2"/>
+                  <a:srgbClr val="E7F0F3"/>
                 </a:solidFill>
                 <a:latin typeface="Arial"/>
               </a:rPr>
-              <a:t>• V_n = ∂ₙφ</a:t>
-            </a:r>
-          </a:p>
-        </p:txBody>
-      </p:sp>
-      <p:sp>
-        <p:nvSpPr>
-          <p:cNvPr id="17" name="C3-E14 text 15" descr="sci-ppt:o015"/>
-          <p:cNvSpPr txBox="1"/>
-          <p:nvPr/>
-        </p:nvSpPr>
-        <p:spPr>
-          <a:xfrm>
-            <a:off x="320040" y="4562856"/>
-            <a:ext cx="5715000" cy="246888"/>
-          </a:xfrm>
-          <a:prstGeom prst="rect">
-            <a:avLst/>
-          </a:prstGeom>
-          <a:noFill/>
-          <a:effectLst/>
-        </p:spPr>
-        <p:txBody>
-          <a:bodyPr wrap="square" lIns="27432" rIns="27432" tIns="18288" bIns="18288" anchor="ctr">
-            <a:spAutoFit/>
-          </a:bodyPr>
-          <a:lstStyle/>
+              <a:t>Far field: the liquid is quiescent far</a:t>
+            </a:r>
+          </a:p>
           <a:p>
             <a:pPr algn="l">
               <a:spcAft>
@@ -3657,27 +4695,59 @@
               </a:spcAft>
             </a:pPr>
             <a:r>
-              <a:rPr sz="1150" b="0" i="0">
+              <a:rPr sz="1250" b="0" i="0">
                 <a:solidFill>
-                  <a:srgbClr val="B4C7D2"/>
+                  <a:srgbClr val="E7F0F3"/>
                 </a:solidFill>
                 <a:latin typeface="Arial"/>
               </a:rPr>
-              <a:t>• V_w wall velocity</a:t>
-            </a:r>
-          </a:p>
-        </p:txBody>
-      </p:sp>
-      <p:sp>
-        <p:nvSpPr>
-          <p:cNvPr id="18" name="C3-E14 text 16" descr="sci-ppt:o016"/>
+              <a:t>away, φ → 0.</a:t>
+            </a:r>
+          </a:p>
+        </p:txBody>
+      </p:sp>
+      <p:sp>
+        <p:nvSpPr>
+          <p:cNvPr id="59" name="C3-E14 ellipse 57" descr="sci-ppt:o057"/>
+          <p:cNvSpPr/>
+          <p:nvPr/>
+        </p:nvSpPr>
+        <p:spPr>
+          <a:xfrm>
+            <a:off x="8033004" y="2671572"/>
+            <a:ext cx="82296" cy="82296"/>
+          </a:xfrm>
+          <a:prstGeom prst="ellipse">
+            <a:avLst/>
+          </a:prstGeom>
+          <a:solidFill>
+            <a:srgbClr val="8EDBD4"/>
+          </a:solidFill>
+          <a:ln w="12700">
+            <a:solidFill>
+              <a:srgbClr val="8EDBD4"/>
+            </a:solidFill>
+          </a:ln>
+          <a:effectLst/>
+        </p:spPr>
+        <p:txBody>
+          <a:bodyPr rtlCol="0" anchor="ctr"/>
+          <a:lstStyle/>
+          <a:p>
+            <a:pPr algn="ctr"/>
+          </a:p>
+        </p:txBody>
+      </p:sp>
+      <p:sp>
+        <p:nvSpPr>
+          <p:cNvPr id="60" name="C3-E14 text 58" descr="sci-ppt:o058"/>
           <p:cNvSpPr txBox="1"/>
           <p:nvPr/>
         </p:nvSpPr>
         <p:spPr>
           <a:xfrm>
-            <a:off x="6217920" y="4562856"/>
-            <a:ext cx="5715000" cy="246888"/>
+            <a:off x="8202168" y="3093084"/>
+            <a:ext cx="3547871" cy="239395"/>
           </a:xfrm>
           <a:prstGeom prst="rect">
             <a:avLst/>
@@ -3686,7 +4756,7 @@
           <a:effectLst/>
         </p:spPr>
         <p:txBody>
-          <a:bodyPr wrap="square" lIns="27432" rIns="27432" tIns="18288" bIns="18288" anchor="ctr">
+          <a:bodyPr wrap="none" lIns="18288" rIns="18288" tIns="18288" bIns="18288" anchor="t">
             <a:spAutoFit/>
           </a:bodyPr>
           <a:lstStyle/>
@@ -3697,27 +4767,59 @@
               </a:spcAft>
             </a:pPr>
             <a:r>
-              <a:rPr sz="1150" b="0" i="0">
+              <a:rPr sz="1250" b="0" i="0">
                 <a:solidFill>
-                  <a:srgbClr val="B4C7D2"/>
+                  <a:srgbClr val="E7F0F3"/>
                 </a:solidFill>
                 <a:latin typeface="Arial"/>
               </a:rPr>
-              <a:t>• φ_Γ, φ₀; t = 0</a:t>
-            </a:r>
-          </a:p>
-        </p:txBody>
-      </p:sp>
-      <p:sp>
-        <p:nvSpPr>
-          <p:cNvPr id="19" name="C3-E14 text 17" descr="sci-ppt:o017"/>
+              <a:t>Initial shape Γ₀ and potential φ₀.</a:t>
+            </a:r>
+          </a:p>
+        </p:txBody>
+      </p:sp>
+      <p:sp>
+        <p:nvSpPr>
+          <p:cNvPr id="61" name="C3-E14 ellipse 59" descr="sci-ppt:o059"/>
+          <p:cNvSpPr/>
+          <p:nvPr/>
+        </p:nvSpPr>
+        <p:spPr>
+          <a:xfrm>
+            <a:off x="8033004" y="3150361"/>
+            <a:ext cx="82296" cy="82296"/>
+          </a:xfrm>
+          <a:prstGeom prst="ellipse">
+            <a:avLst/>
+          </a:prstGeom>
+          <a:solidFill>
+            <a:srgbClr val="8EDBD4"/>
+          </a:solidFill>
+          <a:ln w="12700">
+            <a:solidFill>
+              <a:srgbClr val="8EDBD4"/>
+            </a:solidFill>
+          </a:ln>
+          <a:effectLst/>
+        </p:spPr>
+        <p:txBody>
+          <a:bodyPr rtlCol="0" anchor="ctr"/>
+          <a:lstStyle/>
+          <a:p>
+            <a:pPr algn="ctr"/>
+          </a:p>
+        </p:txBody>
+      </p:sp>
+      <p:sp>
+        <p:nvSpPr>
+          <p:cNvPr id="62" name="C3-E14 text 60" descr="sci-ppt:o060"/>
           <p:cNvSpPr txBox="1"/>
           <p:nvPr/>
         </p:nvSpPr>
         <p:spPr>
           <a:xfrm>
-            <a:off x="320040" y="4796028"/>
-            <a:ext cx="5715000" cy="246888"/>
+            <a:off x="8001000" y="4480560"/>
+            <a:ext cx="3749039" cy="626745"/>
           </a:xfrm>
           <a:prstGeom prst="rect">
             <a:avLst/>
@@ -3726,7 +4828,7 @@
           <a:effectLst/>
         </p:spPr>
         <p:txBody>
-          <a:bodyPr wrap="square" lIns="27432" rIns="27432" tIns="18288" bIns="18288" anchor="ctr">
+          <a:bodyPr wrap="none" lIns="18288" rIns="18288" tIns="18288" bIns="18288" anchor="t">
             <a:spAutoFit/>
           </a:bodyPr>
           <a:lstStyle/>
@@ -3737,39 +4839,15 @@
               </a:spcAft>
             </a:pPr>
             <a:r>
-              <a:rPr sz="1150" b="0" i="0">
+              <a:rPr sz="1250" b="0" i="0">
                 <a:solidFill>
-                  <a:srgbClr val="B4C7D2"/>
+                  <a:srgbClr val="F2B880"/>
                 </a:solidFill>
                 <a:latin typeface="Arial"/>
               </a:rPr>
-              <a:t>• φ → 0 far away</a:t>
-            </a:r>
-          </a:p>
-        </p:txBody>
-      </p:sp>
-      <p:sp>
-        <p:nvSpPr>
-          <p:cNvPr id="20" name="C3-E14 text 18" descr="sci-ppt:o018"/>
-          <p:cNvSpPr txBox="1"/>
-          <p:nvPr/>
-        </p:nvSpPr>
-        <p:spPr>
-          <a:xfrm>
-            <a:off x="320040" y="5596128"/>
-            <a:ext cx="11430000" cy="292608"/>
-          </a:xfrm>
-          <a:prstGeom prst="rect">
-            <a:avLst/>
-          </a:prstGeom>
-          <a:noFill/>
-          <a:effectLst/>
-        </p:spPr>
-        <p:txBody>
-          <a:bodyPr wrap="square" lIns="27432" rIns="27432" tIns="18288" bIns="18288" anchor="ctr">
-            <a:spAutoFit/>
-          </a:bodyPr>
-          <a:lstStyle/>
+              <a:t>Without the last item the potential equation</a:t>
+            </a:r>
+          </a:p>
           <a:p>
             <a:pPr algn="l">
               <a:spcAft>
@@ -3777,39 +4855,15 @@
               </a:spcAft>
             </a:pPr>
             <a:r>
-              <a:rPr sz="1150" b="0" i="0">
+              <a:rPr sz="1250" b="0" i="0">
                 <a:solidFill>
-                  <a:srgbClr val="8EDBD4"/>
+                  <a:srgbClr val="F2B880"/>
                 </a:solidFill>
                 <a:latin typeface="Arial"/>
               </a:rPr>
-              <a:t>Outlet geometry and wall compliance must be supplied</a:t>
-            </a:r>
-          </a:p>
-        </p:txBody>
-      </p:sp>
-      <p:sp>
-        <p:nvSpPr>
-          <p:cNvPr id="21" name="C3-E14 text 19" descr="sci-ppt:o019"/>
-          <p:cNvSpPr txBox="1"/>
-          <p:nvPr/>
-        </p:nvSpPr>
-        <p:spPr>
-          <a:xfrm>
-            <a:off x="320040" y="5870448"/>
-            <a:ext cx="11430000" cy="292608"/>
-          </a:xfrm>
-          <a:prstGeom prst="rect">
-            <a:avLst/>
-          </a:prstGeom>
-          <a:noFill/>
-          <a:effectLst/>
-        </p:spPr>
-        <p:txBody>
-          <a:bodyPr wrap="square" lIns="27432" rIns="27432" tIns="18288" bIns="18288" anchor="ctr">
-            <a:spAutoFit/>
-          </a:bodyPr>
-          <a:lstStyle/>
+              <a:t>has no starting state, so it cannot predict</a:t>
+            </a:r>
+          </a:p>
           <a:p>
             <a:pPr algn="l">
               <a:spcAft>
@@ -3817,27 +4871,27 @@
               </a:spcAft>
             </a:pPr>
             <a:r>
-              <a:rPr sz="1150" b="0" i="0">
+              <a:rPr sz="1250" b="0" i="0">
                 <a:solidFill>
-                  <a:srgbClr val="8EDBD4"/>
+                  <a:srgbClr val="F2B880"/>
                 </a:solidFill>
                 <a:latin typeface="Arial"/>
               </a:rPr>
-              <a:t>Phase flux changes the material-interface condition</a:t>
-            </a:r>
-          </a:p>
-        </p:txBody>
-      </p:sp>
-      <p:sp>
-        <p:nvSpPr>
-          <p:cNvPr id="22" name="C3-E14 text 20" descr="sci-ppt:o020"/>
+              <a:t>a jet.</a:t>
+            </a:r>
+          </a:p>
+        </p:txBody>
+      </p:sp>
+      <p:sp>
+        <p:nvSpPr>
+          <p:cNvPr id="63" name="C3-E14 text 61" descr="sci-ppt:o061"/>
           <p:cNvSpPr txBox="1"/>
           <p:nvPr/>
         </p:nvSpPr>
         <p:spPr>
           <a:xfrm>
-            <a:off x="320040" y="6473952"/>
-            <a:ext cx="11430000" cy="256032"/>
+            <a:off x="320040" y="6510528"/>
+            <a:ext cx="11521440" cy="200660"/>
           </a:xfrm>
           <a:prstGeom prst="rect">
             <a:avLst/>
@@ -3846,7 +4900,7 @@
           <a:effectLst/>
         </p:spPr>
         <p:txBody>
-          <a:bodyPr wrap="square" lIns="27432" rIns="27432" tIns="18288" bIns="18288" anchor="ctr">
+          <a:bodyPr wrap="none" lIns="18288" rIns="18288" tIns="18288" bIns="18288" anchor="t">
             <a:spAutoFit/>
           </a:bodyPr>
           <a:lstStyle/>
@@ -3863,7 +4917,7 @@
                 </a:solidFill>
                 <a:latin typeface="Arial"/>
               </a:rPr>
-              <a:t>Model schematic; geometry is not to scale.</a:t>
+              <a:t>Boundary and initial conditions of Eq. C3-E14.</a:t>
             </a:r>
           </a:p>
         </p:txBody>
